--- a/output/week12/Week12_Presentation_BICT3202_OOAD.pptx
+++ b/output/week12/Week12_Presentation_BICT3202_OOAD.pptx
@@ -10150,7 +10150,7 @@
                 </a:solidFill>
                 <a:latin typeface="Open Sans"/>
               </a:rPr>
-              <a:t>Build a full integrated model for “patient books an appointment” (use case → class → sequence → activity → state).</a:t>
+              <a:t>Build a full integrated model for “patient books an appointment” (use case -&gt; class -&gt; sequence -&gt; activity -&gt; state).</a:t>
             </a:r>
           </a:p>
           <a:p>
@@ -10178,7 +10178,7 @@
                 </a:solidFill>
                 <a:latin typeface="Open Sans"/>
               </a:rPr>
-              <a:t>Audit one use case for missing links (requirement → class → operation → test).</a:t>
+              <a:t>Audit one use case for missing links (requirement -&gt; class -&gt; operation -&gt; test).</a:t>
             </a:r>
           </a:p>
           <a:p>
@@ -10470,7 +10470,7 @@
                 </a:solidFill>
                 <a:latin typeface="Poppins"/>
               </a:rPr>
-              <a:t>Week 11 → 12 → 13</a:t>
+              <a:t>Week 11 -&gt; 12 -&gt; 13</a:t>
             </a:r>
           </a:p>
         </p:txBody>
@@ -11772,7 +11772,7 @@
                 </a:solidFill>
                 <a:latin typeface="Open Sans"/>
               </a:rPr>
-              <a:t>Requirements → models → integrated design → implementation</a:t>
+              <a:t>Requirements -&gt; models -&gt; integrated design -&gt; implementation</a:t>
             </a:r>
           </a:p>
         </p:txBody>
